--- a/小論文添削（ショー）/ワークシート/東洋大学_食環境科学部_小論文ワークシート.pptx
+++ b/小論文添削（ショー）/ワークシート/東洋大学_食環境科学部_小論文ワークシート.pptx
@@ -3418,7 +3418,7 @@
                 <a:latin typeface="游ゴシック"/>
                 <a:ea typeface="游ゴシック"/>
               </a:rPr>
-              <a:t>C3進学アカデミー　学習支援資料</a:t>
+              <a:t>個人指導塾PLATZ　学習支援資料</a:t>
             </a:r>
           </a:p>
         </p:txBody>
@@ -3668,7 +3668,7 @@
                 <a:latin typeface="游ゴシック"/>
                 <a:ea typeface="游ゴシック"/>
               </a:rPr>
-              <a:t>C3進学アカデミー　東洋大学 食環境科学部 小論文ワークシート</a:t>
+              <a:t>個人指導塾PLATZ　東洋大学 食環境科学部 小論文ワークシート</a:t>
             </a:r>
           </a:p>
         </p:txBody>
@@ -4654,7 +4654,7 @@
                 <a:latin typeface="游ゴシック"/>
                 <a:ea typeface="游ゴシック"/>
               </a:rPr>
-              <a:t>C3進学アカデミー　東洋大学 食環境科学部 小論文ワークシート</a:t>
+              <a:t>個人指導塾PLATZ　東洋大学 食環境科学部 小論文ワークシート</a:t>
             </a:r>
           </a:p>
         </p:txBody>
@@ -5790,7 +5790,7 @@
                 <a:latin typeface="游ゴシック"/>
                 <a:ea typeface="游ゴシック"/>
               </a:rPr>
-              <a:t>C3進学アカデミー　東洋大学 食環境科学部 小論文ワークシート</a:t>
+              <a:t>個人指導塾PLATZ　東洋大学 食環境科学部 小論文ワークシート</a:t>
             </a:r>
           </a:p>
         </p:txBody>
@@ -6866,7 +6866,7 @@
                 <a:latin typeface="游ゴシック"/>
                 <a:ea typeface="游ゴシック"/>
               </a:rPr>
-              <a:t>C3進学アカデミー　東洋大学 食環境科学部 小論文ワークシート</a:t>
+              <a:t>個人指導塾PLATZ　東洋大学 食環境科学部 小論文ワークシート</a:t>
             </a:r>
           </a:p>
         </p:txBody>
@@ -8225,7 +8225,7 @@
                 <a:latin typeface="游ゴシック"/>
                 <a:ea typeface="游ゴシック"/>
               </a:rPr>
-              <a:t>C3進学アカデミー　東洋大学 食環境科学部 小論文ワークシート</a:t>
+              <a:t>個人指導塾PLATZ　東洋大学 食環境科学部 小論文ワークシート</a:t>
             </a:r>
           </a:p>
         </p:txBody>
@@ -9635,7 +9635,7 @@
                 <a:latin typeface="游ゴシック"/>
                 <a:ea typeface="游ゴシック"/>
               </a:rPr>
-              <a:t>C3進学アカデミー　東洋大学 食環境科学部 小論文ワークシート</a:t>
+              <a:t>個人指導塾PLATZ　東洋大学 食環境科学部 小論文ワークシート</a:t>
             </a:r>
           </a:p>
         </p:txBody>
@@ -10621,7 +10621,7 @@
                 <a:latin typeface="游ゴシック"/>
                 <a:ea typeface="游ゴシック"/>
               </a:rPr>
-              <a:t>C3進学アカデミー　東洋大学 食環境科学部 小論文ワークシート</a:t>
+              <a:t>個人指導塾PLATZ　東洋大学 食環境科学部 小論文ワークシート</a:t>
             </a:r>
           </a:p>
         </p:txBody>
@@ -11449,7 +11449,7 @@
                 <a:latin typeface="游ゴシック"/>
                 <a:ea typeface="游ゴシック"/>
               </a:rPr>
-              <a:t>C3進学アカデミー　東洋大学 食環境科学部 小論文ワークシート</a:t>
+              <a:t>個人指導塾PLATZ　東洋大学 食環境科学部 小論文ワークシート</a:t>
             </a:r>
           </a:p>
         </p:txBody>
@@ -12525,7 +12525,7 @@
                 <a:latin typeface="游ゴシック"/>
                 <a:ea typeface="游ゴシック"/>
               </a:rPr>
-              <a:t>C3進学アカデミー　東洋大学 食環境科学部 小論文ワークシート</a:t>
+              <a:t>個人指導塾PLATZ　東洋大学 食環境科学部 小論文ワークシート</a:t>
             </a:r>
           </a:p>
         </p:txBody>
@@ -13884,7 +13884,7 @@
                 <a:latin typeface="游ゴシック"/>
                 <a:ea typeface="游ゴシック"/>
               </a:rPr>
-              <a:t>C3進学アカデミー　東洋大学 食環境科学部 小論文ワークシート</a:t>
+              <a:t>個人指導塾PLATZ　東洋大学 食環境科学部 小論文ワークシート</a:t>
             </a:r>
           </a:p>
         </p:txBody>
@@ -15046,7 +15046,7 @@
                 <a:latin typeface="游ゴシック"/>
                 <a:ea typeface="游ゴシック"/>
               </a:rPr>
-              <a:t>C3進学アカデミー　東洋大学 食環境科学部 小論文ワークシート</a:t>
+              <a:t>個人指導塾PLATZ　東洋大学 食環境科学部 小論文ワークシート</a:t>
             </a:r>
           </a:p>
         </p:txBody>
@@ -15856,7 +15856,7 @@
                 <a:latin typeface="游ゴシック"/>
                 <a:ea typeface="游ゴシック"/>
               </a:rPr>
-              <a:t>C3進学アカデミー　東洋大学 食環境科学部 小論文ワークシート</a:t>
+              <a:t>個人指導塾PLATZ　東洋大学 食環境科学部 小論文ワークシート</a:t>
             </a:r>
           </a:p>
         </p:txBody>
@@ -16742,7 +16742,7 @@
                 <a:latin typeface="游ゴシック"/>
                 <a:ea typeface="游ゴシック"/>
               </a:rPr>
-              <a:t>C3進学アカデミー　東洋大学 食環境科学部 小論文ワークシート</a:t>
+              <a:t>個人指導塾PLATZ　東洋大学 食環境科学部 小論文ワークシート</a:t>
             </a:r>
           </a:p>
         </p:txBody>
@@ -17742,7 +17742,7 @@
                 <a:latin typeface="游ゴシック"/>
                 <a:ea typeface="游ゴシック"/>
               </a:rPr>
-              <a:t>C3進学アカデミー　東洋大学 食環境科学部 小論文ワークシート</a:t>
+              <a:t>個人指導塾PLATZ　東洋大学 食環境科学部 小論文ワークシート</a:t>
             </a:r>
           </a:p>
         </p:txBody>
@@ -18818,7 +18818,7 @@
                 <a:latin typeface="游ゴシック"/>
                 <a:ea typeface="游ゴシック"/>
               </a:rPr>
-              <a:t>C3進学アカデミー　東洋大学 食環境科学部 小論文ワークシート</a:t>
+              <a:t>個人指導塾PLATZ　東洋大学 食環境科学部 小論文ワークシート</a:t>
             </a:r>
           </a:p>
         </p:txBody>
@@ -20177,7 +20177,7 @@
                 <a:latin typeface="游ゴシック"/>
                 <a:ea typeface="游ゴシック"/>
               </a:rPr>
-              <a:t>C3進学アカデミー　東洋大学 食環境科学部 小論文ワークシート</a:t>
+              <a:t>個人指導塾PLATZ　東洋大学 食環境科学部 小論文ワークシート</a:t>
             </a:r>
           </a:p>
         </p:txBody>
@@ -21439,7 +21439,7 @@
                 <a:latin typeface="游ゴシック"/>
                 <a:ea typeface="游ゴシック"/>
               </a:rPr>
-              <a:t>C3進学アカデミー　東洋大学 食環境科学部 小論文ワークシート</a:t>
+              <a:t>個人指導塾PLATZ　東洋大学 食環境科学部 小論文ワークシート</a:t>
             </a:r>
           </a:p>
         </p:txBody>
@@ -22281,7 +22281,7 @@
                 <a:latin typeface="游ゴシック"/>
                 <a:ea typeface="游ゴシック"/>
               </a:rPr>
-              <a:t>C3進学アカデミー　東洋大学 食環境科学部 小論文ワークシート</a:t>
+              <a:t>個人指導塾PLATZ　東洋大学 食環境科学部 小論文ワークシート</a:t>
             </a:r>
           </a:p>
         </p:txBody>
@@ -23343,7 +23343,7 @@
                 <a:latin typeface="游ゴシック"/>
                 <a:ea typeface="游ゴシック"/>
               </a:rPr>
-              <a:t>C3進学アカデミー　東洋大学 食環境科学部 小論文ワークシート</a:t>
+              <a:t>個人指導塾PLATZ　東洋大学 食環境科学部 小論文ワークシート</a:t>
             </a:r>
           </a:p>
         </p:txBody>
@@ -24841,7 +24841,7 @@
                 <a:latin typeface="游ゴシック"/>
                 <a:ea typeface="游ゴシック"/>
               </a:rPr>
-              <a:t>C3進学アカデミー　東洋大学 食環境科学部 小論文ワークシート</a:t>
+              <a:t>個人指導塾PLATZ　東洋大学 食環境科学部 小論文ワークシート</a:t>
             </a:r>
           </a:p>
         </p:txBody>
@@ -25831,7 +25831,7 @@
                 <a:latin typeface="游ゴシック"/>
                 <a:ea typeface="游ゴシック"/>
               </a:rPr>
-              <a:t>C3進学アカデミー　東洋大学 食環境科学部 小論文ワークシート</a:t>
+              <a:t>個人指導塾PLATZ　東洋大学 食環境科学部 小論文ワークシート</a:t>
             </a:r>
           </a:p>
         </p:txBody>
@@ -27029,7 +27029,7 @@
                 <a:latin typeface="游ゴシック"/>
                 <a:ea typeface="游ゴシック"/>
               </a:rPr>
-              <a:t>C3進学アカデミー　東洋大学 食環境科学部 小論文ワークシート</a:t>
+              <a:t>個人指導塾PLATZ　東洋大学 食環境科学部 小論文ワークシート</a:t>
             </a:r>
           </a:p>
         </p:txBody>
@@ -28096,7 +28096,7 @@
                 <a:latin typeface="游ゴシック"/>
                 <a:ea typeface="游ゴシック"/>
               </a:rPr>
-              <a:t>C3進学アカデミー　東洋大学 食環境科学部 小論文ワークシート</a:t>
+              <a:t>個人指導塾PLATZ　東洋大学 食環境科学部 小論文ワークシート</a:t>
             </a:r>
           </a:p>
         </p:txBody>
@@ -29384,7 +29384,7 @@
                 <a:latin typeface="游ゴシック"/>
                 <a:ea typeface="游ゴシック"/>
               </a:rPr>
-              <a:t>C3進学アカデミー　東洋大学 食環境科学部 小論文ワークシート</a:t>
+              <a:t>個人指導塾PLATZ　東洋大学 食環境科学部 小論文ワークシート</a:t>
             </a:r>
           </a:p>
         </p:txBody>
@@ -31278,7 +31278,7 @@
                 <a:latin typeface="游ゴシック"/>
                 <a:ea typeface="游ゴシック"/>
               </a:rPr>
-              <a:t>C3進学アカデミー　東洋大学 食環境科学部 小論文ワークシート</a:t>
+              <a:t>個人指導塾PLATZ　東洋大学 食環境科学部 小論文ワークシート</a:t>
             </a:r>
           </a:p>
         </p:txBody>
